--- a/10-plantas/01-steelmaking/05-capacitacion/MS-ACE-08/MS-ACE-08_Capacitacion_AMMX.pptx
+++ b/10-plantas/01-steelmaking/05-capacitacion/MS-ACE-08/MS-ACE-08_Capacitacion_AMMX.pptx
@@ -15149,7 +15149,7 @@
                 <a:ea typeface="Calibri" pitchFamily="34" charset="-122"/>
                 <a:cs typeface="Calibri" pitchFamily="34" charset="-120"/>
               </a:rPr>
-              <a:t>Siguiente paso: OJT supervisado y evaluación práctica (TD-P07); registro en IMaS y DC-3/SIRCE. Validación: visto bueno seguridad (pendientes: técnica, laboral, diseño instruccional).</a:t>
+              <a:t>Siguiente paso: OJT supervisado y evaluación práctica (TD-P07); registro en IMaS y DC-3/SIRCE. Validación: visto bueno técnica, seguridad, laboral, diseño instruccional.</a:t>
             </a:r>
             <a:endParaRPr lang="en-US" sz="750" dirty="0"/>
           </a:p>
@@ -16316,7 +16316,7 @@
                 <a:ea typeface="Century Gothic" pitchFamily="34" charset="-122"/>
                 <a:cs typeface="Century Gothic" pitchFamily="34" charset="-120"/>
               </a:rPr>
-              <a:t>Conocer el régimen trabajo/descanso de tu puesto según la Tabla A1 de la NOM-015 y respetar los descansos.</a:t>
+              <a:t>Seguir el régimen trabajo/descanso de tu puesto según la Tabla A1 de la NOM-015 y respetar los descansos.</a:t>
             </a:r>
             <a:endParaRPr lang="en-US" sz="1100" dirty="0"/>
           </a:p>
@@ -16521,7 +16521,7 @@
                 <a:ea typeface="Century Gothic" pitchFamily="34" charset="-122"/>
                 <a:cs typeface="Century Gothic" pitchFamily="34" charset="-120"/>
               </a:rPr>
-              <a:t>Reconocer y atender el golpe de calor</a:t>
+              <a:t>Detectar y atender el golpe de calor</a:t>
             </a:r>
             <a:endParaRPr lang="en-US" sz="1350" dirty="0"/>
           </a:p>
@@ -18198,7 +18198,7 @@
                           <a:ea typeface="Century Gothic" pitchFamily="34" charset="-122"/>
                           <a:cs typeface="Century Gothic" pitchFamily="34" charset="-120"/>
                         </a:rPr>
-                        <a:t>Relaciones Laborales / CMCAP</a:t>
+                        <a:t>Relaciones Laborales / Comisión Mixta de SyH</a:t>
                       </a:r>
                       <a:endParaRPr lang="en-US" sz="1100" dirty="0">
                         <a:latin typeface="Century Gothic" charset="0"/>
@@ -18266,7 +18266,7 @@
                           <a:ea typeface="Century Gothic" pitchFamily="34" charset="-122"/>
                           <a:cs typeface="Century Gothic" pitchFamily="34" charset="-120"/>
                         </a:rPr>
-                        <a:t>Validan el régimen de descansos con el sindicato</a:t>
+                        <a:t>Revisan el régimen de descansos con el sindicato (CCT)</a:t>
                       </a:r>
                       <a:endParaRPr lang="en-US" sz="1100" dirty="0">
                         <a:latin typeface="Century Gothic" charset="0"/>
@@ -23620,7 +23620,7 @@
                           <a:ea typeface="Century Gothic" pitchFamily="34" charset="-122"/>
                           <a:cs typeface="Century Gothic" pitchFamily="34" charset="-120"/>
                         </a:rPr>
-                        <a:t>Hidratación</a:t>
+                        <a:t>Hidratación (todas)</a:t>
                       </a:r>
                       <a:endParaRPr lang="en-US" sz="1000" dirty="0">
                         <a:latin typeface="Century Gothic" charset="0"/>
@@ -23688,7 +23688,7 @@
                           <a:ea typeface="Century Gothic" pitchFamily="34" charset="-122"/>
                           <a:cs typeface="Century Gothic" pitchFamily="34" charset="-120"/>
                         </a:rPr>
-                        <a:t>750–1,000 mL/h</a:t>
+                        <a:t>Normal 750–1,000 mL/h</a:t>
                       </a:r>
                       <a:endParaRPr lang="en-US" sz="1000" dirty="0">
                         <a:latin typeface="Century Gothic" charset="0"/>
@@ -23756,7 +23756,7 @@
                           <a:ea typeface="Century Gothic" pitchFamily="34" charset="-122"/>
                           <a:cs typeface="Century Gothic" pitchFamily="34" charset="-120"/>
                         </a:rPr>
-                        <a:t>&lt; 500 mL/h</a:t>
+                        <a:t>Bajo &lt; 500 mL/h</a:t>
                       </a:r>
                       <a:endParaRPr lang="en-US" sz="1000" dirty="0">
                         <a:latin typeface="Century Gothic" charset="0"/>
@@ -23824,7 +23824,7 @@
                           <a:ea typeface="Century Gothic" pitchFamily="34" charset="-122"/>
                           <a:cs typeface="Century Gothic" pitchFamily="34" charset="-120"/>
                         </a:rPr>
-                        <a:t>&gt; 1,500 mL/h [Sup.]</a:t>
+                        <a:t>Alto &gt; 1,500 mL/h [Sup.]</a:t>
                       </a:r>
                       <a:endParaRPr lang="en-US" sz="1000" dirty="0">
                         <a:latin typeface="Century Gothic" charset="0"/>
@@ -23894,7 +23894,7 @@
                           <a:ea typeface="Century Gothic" pitchFamily="34" charset="-122"/>
                           <a:cs typeface="Century Gothic" pitchFamily="34" charset="-120"/>
                         </a:rPr>
-                        <a:t>Pérdida de peso</a:t>
+                        <a:t>Pérdida de peso (todas)</a:t>
                       </a:r>
                       <a:endParaRPr lang="en-US" sz="1000" dirty="0">
                         <a:latin typeface="Century Gothic" charset="0"/>
@@ -23962,7 +23962,7 @@
                           <a:ea typeface="Century Gothic" pitchFamily="34" charset="-122"/>
                           <a:cs typeface="Century Gothic" pitchFamily="34" charset="-120"/>
                         </a:rPr>
-                        <a:t>&lt; 1.5 %</a:t>
+                        <a:t>Normal &lt; 1.5 %</a:t>
                       </a:r>
                       <a:endParaRPr lang="en-US" sz="1000" dirty="0">
                         <a:latin typeface="Century Gothic" charset="0"/>
@@ -24030,7 +24030,7 @@
                           <a:ea typeface="Century Gothic" pitchFamily="34" charset="-122"/>
                           <a:cs typeface="Century Gothic" pitchFamily="34" charset="-120"/>
                         </a:rPr>
-                        <a:t>≥ 2 % [Supuesto]</a:t>
+                        <a:t>Límite ≥ 2 % [Supuesto]</a:t>
                       </a:r>
                       <a:endParaRPr lang="en-US" sz="1000" dirty="0">
                         <a:latin typeface="Century Gothic" charset="0"/>
@@ -24098,7 +24098,7 @@
                           <a:ea typeface="Century Gothic" pitchFamily="34" charset="-122"/>
                           <a:cs typeface="Century Gothic" pitchFamily="34" charset="-120"/>
                         </a:rPr>
-                        <a:t>Retirar del calor</a:t>
+                        <a:t>Acción: retirar del calor</a:t>
                       </a:r>
                       <a:endParaRPr lang="en-US" sz="1000" dirty="0">
                         <a:latin typeface="Century Gothic" charset="0"/>
@@ -24442,7 +24442,7 @@
                           <a:ea typeface="Century Gothic" pitchFamily="34" charset="-122"/>
                           <a:cs typeface="Century Gothic" pitchFamily="34" charset="-120"/>
                         </a:rPr>
-                        <a:t>Permanencia en zona roja</a:t>
+                        <a:t>Zona roja (todas)</a:t>
                       </a:r>
                       <a:endParaRPr lang="en-US" sz="1000" dirty="0">
                         <a:latin typeface="Century Gothic" charset="0"/>
@@ -24510,7 +24510,7 @@
                           <a:ea typeface="Century Gothic" pitchFamily="34" charset="-122"/>
                           <a:cs typeface="Century Gothic" pitchFamily="34" charset="-120"/>
                         </a:rPr>
-                        <a:t>≤ 2 min</a:t>
+                        <a:t>Normal ≤ 2 min</a:t>
                       </a:r>
                       <a:endParaRPr lang="en-US" sz="1000" dirty="0">
                         <a:latin typeface="Century Gothic" charset="0"/>
@@ -24578,7 +24578,7 @@
                           <a:ea typeface="Century Gothic" pitchFamily="34" charset="-122"/>
                           <a:cs typeface="Century Gothic" pitchFamily="34" charset="-120"/>
                         </a:rPr>
-                        <a:t>&gt; 2 min</a:t>
+                        <a:t>Límite &gt; 2 min</a:t>
                       </a:r>
                       <a:endParaRPr lang="en-US" sz="1000" dirty="0">
                         <a:latin typeface="Century Gothic" charset="0"/>
@@ -24646,7 +24646,7 @@
                           <a:ea typeface="Century Gothic" pitchFamily="34" charset="-122"/>
                           <a:cs typeface="Century Gothic" pitchFamily="34" charset="-120"/>
                         </a:rPr>
-                        <a:t>Salir y recuperar</a:t>
+                        <a:t>Acción: salir y recuperar</a:t>
                       </a:r>
                       <a:endParaRPr lang="en-US" sz="1000" dirty="0">
                         <a:latin typeface="Century Gothic" charset="0"/>
